--- a/Propale_cache/9605602c-c931-44a3-aeed-746820f803ee.pptx
+++ b/Propale_cache/9605602c-c931-44a3-aeed-746820f803ee.pptx
@@ -20924,7 +20924,7 @@
                 <a:cs typeface="Work Sans"/>
                 <a:sym typeface="Work Sans"/>
               </a:rPr>
-              <a:t>Réalisation d’une mission suivant les procédures convenues pour le compte d’Air Liquide CI </a:t>
+              <a:t>Réalisation d’une mission suivant les procédures convenues pour le compte de NSIA BANQUE CI</a:t>
             </a:r>
             <a:r>
               <a:rPr b="1" i="0" lang="fr-FR" sz="2800" u="none" cap="none" strike="noStrike">
